--- a/Projektbericht/Poster/Poster_RoboterTetris_Entwurf_v04.pptx
+++ b/Projektbericht/Poster/Poster_RoboterTetris_Entwurf_v04.pptx
@@ -143,24 +143,105 @@
 <pc:chgInfo xmlns:a="http://schemas.openxmlformats.org/drawingml/2006/main" xmlns:r="http://schemas.openxmlformats.org/officeDocument/2006/relationships" xmlns:ac="http://schemas.microsoft.com/office/drawing/2013/main/command" xmlns:pc="http://schemas.microsoft.com/office/powerpoint/2013/main/command">
   <pc:docChgLst>
     <pc:chgData name="Tobias Unger" userId="0a5458e38b5f4a0f" providerId="LiveId" clId="{5C6CAE59-BAC7-4E9C-B1A6-AA8C1CFC41BD}"/>
-    <pc:docChg chg="delSld">
-      <pc:chgData name="Tobias Unger" userId="0a5458e38b5f4a0f" providerId="LiveId" clId="{5C6CAE59-BAC7-4E9C-B1A6-AA8C1CFC41BD}" dt="2026-10-01T20:42:29.781" v="1" actId="47"/>
+    <pc:docChg chg="delSld modSld">
+      <pc:chgData name="Tobias Unger" userId="0a5458e38b5f4a0f" providerId="LiveId" clId="{5C6CAE59-BAC7-4E9C-B1A6-AA8C1CFC41BD}" dt="2026-10-08T16:11:44.712" v="17" actId="1035"/>
       <pc:docMkLst>
         <pc:docMk/>
       </pc:docMkLst>
-      <pc:sldChg chg="del">
-        <pc:chgData name="Tobias Unger" userId="0a5458e38b5f4a0f" providerId="LiveId" clId="{5C6CAE59-BAC7-4E9C-B1A6-AA8C1CFC41BD}" dt="2026-10-01T20:42:29.781" v="1" actId="47"/>
+      <pc:sldChg chg="modSp mod">
+        <pc:chgData name="Tobias Unger" userId="0a5458e38b5f4a0f" providerId="LiveId" clId="{5C6CAE59-BAC7-4E9C-B1A6-AA8C1CFC41BD}" dt="2026-10-08T16:11:44.712" v="17" actId="1035"/>
         <pc:sldMkLst>
           <pc:docMk/>
-          <pc:sldMk cId="4236382723" sldId="289"/>
+          <pc:sldMk cId="293167634" sldId="291"/>
         </pc:sldMkLst>
-      </pc:sldChg>
-      <pc:sldChg chg="del">
-        <pc:chgData name="Tobias Unger" userId="0a5458e38b5f4a0f" providerId="LiveId" clId="{5C6CAE59-BAC7-4E9C-B1A6-AA8C1CFC41BD}" dt="2026-10-01T20:42:29.228" v="0" actId="47"/>
-        <pc:sldMkLst>
-          <pc:docMk/>
-          <pc:sldMk cId="3100510577" sldId="290"/>
-        </pc:sldMkLst>
+        <pc:spChg chg="mod">
+          <ac:chgData name="Tobias Unger" userId="0a5458e38b5f4a0f" providerId="LiveId" clId="{5C6CAE59-BAC7-4E9C-B1A6-AA8C1CFC41BD}" dt="2026-10-08T16:11:44.712" v="17" actId="1035"/>
+          <ac:spMkLst>
+            <pc:docMk/>
+            <pc:sldMk cId="293167634" sldId="291"/>
+            <ac:spMk id="6" creationId="{834437DE-1CAD-F176-5FA7-B406AB61F099}"/>
+          </ac:spMkLst>
+        </pc:spChg>
+        <pc:spChg chg="mod">
+          <ac:chgData name="Tobias Unger" userId="0a5458e38b5f4a0f" providerId="LiveId" clId="{5C6CAE59-BAC7-4E9C-B1A6-AA8C1CFC41BD}" dt="2026-10-07T19:01:24.604" v="2" actId="20577"/>
+          <ac:spMkLst>
+            <pc:docMk/>
+            <pc:sldMk cId="293167634" sldId="291"/>
+            <ac:spMk id="24" creationId="{79229976-18A4-6B47-53C0-B7E8C3510883}"/>
+          </ac:spMkLst>
+        </pc:spChg>
+        <pc:spChg chg="mod">
+          <ac:chgData name="Tobias Unger" userId="0a5458e38b5f4a0f" providerId="LiveId" clId="{5C6CAE59-BAC7-4E9C-B1A6-AA8C1CFC41BD}" dt="2026-10-08T16:11:44.712" v="17" actId="1035"/>
+          <ac:spMkLst>
+            <pc:docMk/>
+            <pc:sldMk cId="293167634" sldId="291"/>
+            <ac:spMk id="1004" creationId="{FCC18589-030B-4E5C-0B3E-ADE6660BF89E}"/>
+          </ac:spMkLst>
+        </pc:spChg>
+        <pc:spChg chg="mod">
+          <ac:chgData name="Tobias Unger" userId="0a5458e38b5f4a0f" providerId="LiveId" clId="{5C6CAE59-BAC7-4E9C-B1A6-AA8C1CFC41BD}" dt="2026-10-08T16:11:44.712" v="17" actId="1035"/>
+          <ac:spMkLst>
+            <pc:docMk/>
+            <pc:sldMk cId="293167634" sldId="291"/>
+            <ac:spMk id="1005" creationId="{8B68F93A-89B8-6A5A-7F7A-601F609E11E5}"/>
+          </ac:spMkLst>
+        </pc:spChg>
+        <pc:spChg chg="mod">
+          <ac:chgData name="Tobias Unger" userId="0a5458e38b5f4a0f" providerId="LiveId" clId="{5C6CAE59-BAC7-4E9C-B1A6-AA8C1CFC41BD}" dt="2026-10-08T16:11:44.712" v="17" actId="1035"/>
+          <ac:spMkLst>
+            <pc:docMk/>
+            <pc:sldMk cId="293167634" sldId="291"/>
+            <ac:spMk id="1007" creationId="{046FD701-8DB1-4472-303D-288D7FBA9488}"/>
+          </ac:spMkLst>
+        </pc:spChg>
+        <pc:spChg chg="mod">
+          <ac:chgData name="Tobias Unger" userId="0a5458e38b5f4a0f" providerId="LiveId" clId="{5C6CAE59-BAC7-4E9C-B1A6-AA8C1CFC41BD}" dt="2026-10-08T16:11:44.712" v="17" actId="1035"/>
+          <ac:spMkLst>
+            <pc:docMk/>
+            <pc:sldMk cId="293167634" sldId="291"/>
+            <ac:spMk id="1008" creationId="{3A8F67E5-6F6E-DF74-1AF4-4E77EBC93E06}"/>
+          </ac:spMkLst>
+        </pc:spChg>
+        <pc:spChg chg="mod">
+          <ac:chgData name="Tobias Unger" userId="0a5458e38b5f4a0f" providerId="LiveId" clId="{5C6CAE59-BAC7-4E9C-B1A6-AA8C1CFC41BD}" dt="2026-10-08T16:11:44.712" v="17" actId="1035"/>
+          <ac:spMkLst>
+            <pc:docMk/>
+            <pc:sldMk cId="293167634" sldId="291"/>
+            <ac:spMk id="1009" creationId="{36FE309B-6AD4-318B-B293-2F98A089745F}"/>
+          </ac:spMkLst>
+        </pc:spChg>
+        <pc:spChg chg="mod">
+          <ac:chgData name="Tobias Unger" userId="0a5458e38b5f4a0f" providerId="LiveId" clId="{5C6CAE59-BAC7-4E9C-B1A6-AA8C1CFC41BD}" dt="2026-10-08T16:11:44.712" v="17" actId="1035"/>
+          <ac:spMkLst>
+            <pc:docMk/>
+            <pc:sldMk cId="293167634" sldId="291"/>
+            <ac:spMk id="1010" creationId="{A7D5B1B0-0C1D-E3A0-017A-FB223E016189}"/>
+          </ac:spMkLst>
+        </pc:spChg>
+        <pc:spChg chg="mod">
+          <ac:chgData name="Tobias Unger" userId="0a5458e38b5f4a0f" providerId="LiveId" clId="{5C6CAE59-BAC7-4E9C-B1A6-AA8C1CFC41BD}" dt="2026-10-08T16:11:44.712" v="17" actId="1035"/>
+          <ac:spMkLst>
+            <pc:docMk/>
+            <pc:sldMk cId="293167634" sldId="291"/>
+            <ac:spMk id="1011" creationId="{0CE7B7D4-968C-05F1-29E2-9CD8E92F9FB2}"/>
+          </ac:spMkLst>
+        </pc:spChg>
+        <pc:spChg chg="mod">
+          <ac:chgData name="Tobias Unger" userId="0a5458e38b5f4a0f" providerId="LiveId" clId="{5C6CAE59-BAC7-4E9C-B1A6-AA8C1CFC41BD}" dt="2026-10-08T16:11:44.712" v="17" actId="1035"/>
+          <ac:spMkLst>
+            <pc:docMk/>
+            <pc:sldMk cId="293167634" sldId="291"/>
+            <ac:spMk id="1012" creationId="{5A1F9004-EE58-999E-868C-25E0F15A6C23}"/>
+          </ac:spMkLst>
+        </pc:spChg>
+        <pc:spChg chg="mod">
+          <ac:chgData name="Tobias Unger" userId="0a5458e38b5f4a0f" providerId="LiveId" clId="{5C6CAE59-BAC7-4E9C-B1A6-AA8C1CFC41BD}" dt="2026-10-08T16:11:44.712" v="17" actId="1035"/>
+          <ac:spMkLst>
+            <pc:docMk/>
+            <pc:sldMk cId="293167634" sldId="291"/>
+            <ac:spMk id="1013" creationId="{9783A2C2-D86D-86AF-14AA-A4BB149B0028}"/>
+          </ac:spMkLst>
+        </pc:spChg>
       </pc:sldChg>
     </pc:docChg>
   </pc:docChgLst>
@@ -249,7 +330,7 @@
           <a:p>
             <a:fld id="{5EC1F608-7D39-B243-AD60-D0569B8B85AE}" type="datetimeFigureOut">
               <a:rPr lang="de-DE" smtClean="0"/>
-              <a:t>02.10.2026</a:t>
+              <a:t>07.10.2026</a:t>
             </a:fld>
             <a:endParaRPr lang="de-DE"/>
           </a:p>
@@ -2389,7 +2470,7 @@
         </p:nvSpPr>
         <p:spPr>
           <a:xfrm>
-            <a:off x="723900" y="15429738"/>
+            <a:off x="723900" y="15048738"/>
             <a:ext cx="9658350" cy="1085850"/>
           </a:xfrm>
           <a:prstGeom prst="rect">
@@ -2456,7 +2537,7 @@
         </p:nvSpPr>
         <p:spPr>
           <a:xfrm>
-            <a:off x="781050" y="16581120"/>
+            <a:off x="781050" y="16200120"/>
             <a:ext cx="590550" cy="590550"/>
           </a:xfrm>
           <a:prstGeom prst="ellipse">
@@ -2517,7 +2598,7 @@
         </p:nvSpPr>
         <p:spPr>
           <a:xfrm>
-            <a:off x="1685925" y="16504920"/>
+            <a:off x="1685925" y="16123920"/>
             <a:ext cx="8601075" cy="571500"/>
           </a:xfrm>
           <a:prstGeom prst="rect">
@@ -2584,7 +2665,7 @@
         </p:nvSpPr>
         <p:spPr>
           <a:xfrm>
-            <a:off x="1685925" y="17057370"/>
+            <a:off x="1685925" y="16676370"/>
             <a:ext cx="8601075" cy="523875"/>
           </a:xfrm>
           <a:prstGeom prst="rect">
@@ -2651,7 +2732,7 @@
         </p:nvSpPr>
         <p:spPr>
           <a:xfrm>
-            <a:off x="962025" y="17238345"/>
+            <a:off x="962025" y="16857345"/>
             <a:ext cx="219075" cy="266700"/>
           </a:xfrm>
           <a:prstGeom prst="downArrow">
@@ -2688,7 +2769,7 @@
         </p:nvSpPr>
         <p:spPr>
           <a:xfrm>
-            <a:off x="781050" y="17666970"/>
+            <a:off x="781050" y="17285970"/>
             <a:ext cx="590550" cy="590550"/>
           </a:xfrm>
           <a:prstGeom prst="ellipse">
@@ -2747,7 +2828,7 @@
         </p:nvSpPr>
         <p:spPr>
           <a:xfrm>
-            <a:off x="1685925" y="17590770"/>
+            <a:off x="1685925" y="17209770"/>
             <a:ext cx="8601075" cy="571500"/>
           </a:xfrm>
           <a:prstGeom prst="rect">
@@ -2814,7 +2895,7 @@
         </p:nvSpPr>
         <p:spPr>
           <a:xfrm>
-            <a:off x="1685925" y="18143220"/>
+            <a:off x="1685925" y="17762220"/>
             <a:ext cx="8601075" cy="523875"/>
           </a:xfrm>
           <a:prstGeom prst="rect">
@@ -2881,7 +2962,7 @@
         </p:nvSpPr>
         <p:spPr>
           <a:xfrm>
-            <a:off x="962025" y="18324195"/>
+            <a:off x="962025" y="17943195"/>
             <a:ext cx="219075" cy="266700"/>
           </a:xfrm>
           <a:prstGeom prst="downArrow">
@@ -2918,7 +2999,7 @@
         </p:nvSpPr>
         <p:spPr>
           <a:xfrm>
-            <a:off x="781050" y="18752820"/>
+            <a:off x="781050" y="18371820"/>
             <a:ext cx="590550" cy="590550"/>
           </a:xfrm>
           <a:prstGeom prst="ellipse">
@@ -2977,7 +3058,7 @@
         </p:nvSpPr>
         <p:spPr>
           <a:xfrm>
-            <a:off x="1685925" y="18676620"/>
+            <a:off x="1685925" y="18295620"/>
             <a:ext cx="8601075" cy="571500"/>
           </a:xfrm>
           <a:prstGeom prst="rect">
@@ -3044,7 +3125,7 @@
         </p:nvSpPr>
         <p:spPr>
           <a:xfrm>
-            <a:off x="1685925" y="19229070"/>
+            <a:off x="1685925" y="18848070"/>
             <a:ext cx="8601075" cy="523875"/>
           </a:xfrm>
           <a:prstGeom prst="rect">
@@ -3111,7 +3192,7 @@
         </p:nvSpPr>
         <p:spPr>
           <a:xfrm>
-            <a:off x="962025" y="19410045"/>
+            <a:off x="962025" y="19029045"/>
             <a:ext cx="219075" cy="266700"/>
           </a:xfrm>
           <a:prstGeom prst="downArrow">
@@ -3148,7 +3229,7 @@
         </p:nvSpPr>
         <p:spPr>
           <a:xfrm>
-            <a:off x="781050" y="19838670"/>
+            <a:off x="781050" y="19457670"/>
             <a:ext cx="590550" cy="590550"/>
           </a:xfrm>
           <a:prstGeom prst="ellipse">
@@ -3207,7 +3288,7 @@
         </p:nvSpPr>
         <p:spPr>
           <a:xfrm>
-            <a:off x="1685925" y="19762470"/>
+            <a:off x="1685925" y="19381470"/>
             <a:ext cx="8601075" cy="571500"/>
           </a:xfrm>
           <a:prstGeom prst="rect">
@@ -3274,7 +3355,7 @@
         </p:nvSpPr>
         <p:spPr>
           <a:xfrm>
-            <a:off x="1685925" y="20314920"/>
+            <a:off x="1685925" y="19933920"/>
             <a:ext cx="9005887" cy="571500"/>
           </a:xfrm>
           <a:prstGeom prst="rect">
@@ -4145,7 +4226,7 @@
                 <a:ea typeface="Calibri"/>
                 <a:cs typeface="Calibri"/>
               </a:rPr>
-              <a:t>Abb. 3: Systemablauf für das Greifen der Klötze</a:t>
+              <a:t>Abb. 3: Systemablauf für das Greifen der Klötze </a:t>
             </a:r>
           </a:p>
         </p:txBody>
